--- a/out/instr-01-kristallyuks-etanol.pptx
+++ b/out/instr-01-kristallyuks-etanol.pptx
@@ -37038,7 +37038,7 @@
                 </a:solidFill>
                 <a:latin typeface="Calibri"/>
               </a:rPr>
-              <a:t>▸  Rasm manbalari: Wikimedia Commons (CC0, CC BY-SA 4.0, CC BY 2.0) — IMAGES.json.</a:t>
+              <a:t>▸  Rasm manbalari: Wikimedia Commons (CC0, CC BY-SA 4.0, CC BY 2.0), muallif va litsenziya har rasm ostida; blok-sxemalar — Forensic Expert (o‘z chizma).</a:t>
             </a:r>
           </a:p>
         </p:txBody>
